--- a/Documentation/Implementing_Tests_for_LLM_Prompts_with_Semantic_Assertions _Team_LLM_QA_Lab_Presentation.pptx
+++ b/Documentation/Implementing_Tests_for_LLM_Prompts_with_Semantic_Assertions _Team_LLM_QA_Lab_Presentation.pptx
@@ -135,7 +135,7 @@
 <file path=ppt/charts/chart1.xml><?xml version="1.0" encoding="utf-8"?>
 <c:chartSpace xmlns:c="http://schemas.openxmlformats.org/drawingml/2006/chart" xmlns:a="http://schemas.openxmlformats.org/drawingml/2006/main" xmlns:r="http://schemas.openxmlformats.org/officeDocument/2006/relationships" xmlns:c16r2="http://schemas.microsoft.com/office/drawing/2015/06/chart">
   <c:date1904 val="0"/>
-  <c:lang val="en-US"/>
+  <c:lang val="en-GB"/>
   <c:roundedCorners val="0"/>
   <c:style val="2"/>
   <c:chart>
@@ -613,7 +613,7 @@
           </a:lstStyle>
           <a:p>
             <a:fld id="{9F2930DB-422F-4099-AAD2-5DFFCD507914}" type="datetimeFigureOut">
-              <a:t>3/24/2026</a:t>
+              <a:t>25.03.26</a:t>
             </a:fld>
             <a:endParaRPr lang="en-US"/>
           </a:p>
@@ -2332,6 +2332,13 @@
             <a:prstDash val="solid"/>
           </a:ln>
         </p:spPr>
+        <p:txBody>
+          <a:bodyPr/>
+          <a:lstStyle/>
+          <a:p>
+            <a:endParaRPr lang="en-DE"/>
+          </a:p>
+        </p:txBody>
       </p:sp>
       <p:sp>
         <p:nvSpPr>
@@ -2361,6 +2368,13 @@
             <a:prstDash val="solid"/>
           </a:ln>
         </p:spPr>
+        <p:txBody>
+          <a:bodyPr/>
+          <a:lstStyle/>
+          <a:p>
+            <a:endParaRPr lang="en-DE"/>
+          </a:p>
+        </p:txBody>
       </p:sp>
       <p:sp>
         <p:nvSpPr>
@@ -2462,6 +2476,13 @@
             <a:prstDash val="solid"/>
           </a:ln>
         </p:spPr>
+        <p:txBody>
+          <a:bodyPr/>
+          <a:lstStyle/>
+          <a:p>
+            <a:endParaRPr lang="en-DE"/>
+          </a:p>
+        </p:txBody>
       </p:sp>
       <p:sp>
         <p:nvSpPr>
@@ -2536,6 +2557,21 @@
                 <a:cs typeface="Calibri" pitchFamily="34" charset="-120"/>
               </a:rPr>
               <a:t>Md Abdulla AL Mahamud Rosi</a:t>
+            </a:r>
+          </a:p>
+          <a:p>
+            <a:pPr marL="0" indent="0">
+              <a:buNone/>
+            </a:pPr>
+            <a:r>
+              <a:rPr lang="en-US" sz="1200" b="1" dirty="0">
+                <a:solidFill>
+                  <a:srgbClr val="8BAFC0"/>
+                </a:solidFill>
+                <a:latin typeface="Calibri" pitchFamily="34" charset="0"/>
+                <a:cs typeface="Calibri" pitchFamily="34" charset="-120"/>
+              </a:rPr>
+              <a:t>Mr.Nr:1519699</a:t>
             </a:r>
             <a:endParaRPr lang="en-US" sz="1200" dirty="0"/>
           </a:p>
@@ -2601,6 +2637,13 @@
             <a:prstDash val="solid"/>
           </a:ln>
         </p:spPr>
+        <p:txBody>
+          <a:bodyPr/>
+          <a:lstStyle/>
+          <a:p>
+            <a:endParaRPr lang="en-DE"/>
+          </a:p>
+        </p:txBody>
       </p:sp>
       <p:sp>
         <p:nvSpPr>
@@ -2667,6 +2710,13 @@
             <a:prstDash val="solid"/>
           </a:ln>
         </p:spPr>
+        <p:txBody>
+          <a:bodyPr/>
+          <a:lstStyle/>
+          <a:p>
+            <a:endParaRPr lang="en-DE"/>
+          </a:p>
+        </p:txBody>
       </p:sp>
       <p:sp>
         <p:nvSpPr>
@@ -2733,6 +2783,13 @@
             <a:prstDash val="solid"/>
           </a:ln>
         </p:spPr>
+        <p:txBody>
+          <a:bodyPr/>
+          <a:lstStyle/>
+          <a:p>
+            <a:endParaRPr lang="en-DE"/>
+          </a:p>
+        </p:txBody>
       </p:sp>
       <p:sp>
         <p:nvSpPr>
@@ -2799,6 +2856,13 @@
             <a:prstDash val="solid"/>
           </a:ln>
         </p:spPr>
+        <p:txBody>
+          <a:bodyPr/>
+          <a:lstStyle/>
+          <a:p>
+            <a:endParaRPr lang="en-DE"/>
+          </a:p>
+        </p:txBody>
       </p:sp>
       <p:sp>
         <p:nvSpPr>
@@ -2896,6 +2960,13 @@
             <a:prstDash val="solid"/>
           </a:ln>
         </p:spPr>
+        <p:txBody>
+          <a:bodyPr/>
+          <a:lstStyle/>
+          <a:p>
+            <a:endParaRPr lang="en-DE"/>
+          </a:p>
+        </p:txBody>
       </p:sp>
       <p:sp>
         <p:nvSpPr>
@@ -2921,6 +2992,13 @@
             <a:prstDash val="solid"/>
           </a:ln>
         </p:spPr>
+        <p:txBody>
+          <a:bodyPr/>
+          <a:lstStyle/>
+          <a:p>
+            <a:endParaRPr lang="en-DE"/>
+          </a:p>
+        </p:txBody>
       </p:sp>
       <p:sp>
         <p:nvSpPr>
@@ -3070,6 +3148,13 @@
             </a:outerShdw>
           </a:effectLst>
         </p:spPr>
+        <p:txBody>
+          <a:bodyPr/>
+          <a:lstStyle/>
+          <a:p>
+            <a:endParaRPr lang="en-DE"/>
+          </a:p>
+        </p:txBody>
       </p:sp>
       <p:sp>
         <p:nvSpPr>
@@ -3095,6 +3180,13 @@
             <a:prstDash val="solid"/>
           </a:ln>
         </p:spPr>
+        <p:txBody>
+          <a:bodyPr/>
+          <a:lstStyle/>
+          <a:p>
+            <a:endParaRPr lang="en-DE"/>
+          </a:p>
+        </p:txBody>
       </p:sp>
       <p:sp>
         <p:nvSpPr>
@@ -3198,6 +3290,13 @@
             <a:prstDash val="solid"/>
           </a:ln>
         </p:spPr>
+        <p:txBody>
+          <a:bodyPr/>
+          <a:lstStyle/>
+          <a:p>
+            <a:endParaRPr lang="en-DE"/>
+          </a:p>
+        </p:txBody>
       </p:sp>
       <p:sp>
         <p:nvSpPr>
@@ -3379,6 +3478,13 @@
             <a:prstDash val="solid"/>
           </a:ln>
         </p:spPr>
+        <p:txBody>
+          <a:bodyPr/>
+          <a:lstStyle/>
+          <a:p>
+            <a:endParaRPr lang="en-DE"/>
+          </a:p>
+        </p:txBody>
       </p:sp>
       <p:sp>
         <p:nvSpPr>
@@ -3560,6 +3666,13 @@
             <a:prstDash val="solid"/>
           </a:ln>
         </p:spPr>
+        <p:txBody>
+          <a:bodyPr/>
+          <a:lstStyle/>
+          <a:p>
+            <a:endParaRPr lang="en-DE"/>
+          </a:p>
+        </p:txBody>
       </p:sp>
       <p:sp>
         <p:nvSpPr>
@@ -3748,6 +3861,13 @@
             </a:outerShdw>
           </a:effectLst>
         </p:spPr>
+        <p:txBody>
+          <a:bodyPr/>
+          <a:lstStyle/>
+          <a:p>
+            <a:endParaRPr lang="en-DE"/>
+          </a:p>
+        </p:txBody>
       </p:sp>
       <p:sp>
         <p:nvSpPr>
@@ -3773,6 +3893,13 @@
             <a:prstDash val="solid"/>
           </a:ln>
         </p:spPr>
+        <p:txBody>
+          <a:bodyPr/>
+          <a:lstStyle/>
+          <a:p>
+            <a:endParaRPr lang="en-DE"/>
+          </a:p>
+        </p:txBody>
       </p:sp>
       <p:sp>
         <p:nvSpPr>
@@ -3876,6 +4003,13 @@
             <a:prstDash val="solid"/>
           </a:ln>
         </p:spPr>
+        <p:txBody>
+          <a:bodyPr/>
+          <a:lstStyle/>
+          <a:p>
+            <a:endParaRPr lang="en-DE"/>
+          </a:p>
+        </p:txBody>
       </p:sp>
       <p:sp>
         <p:nvSpPr>
@@ -4018,6 +4152,13 @@
             <a:prstDash val="solid"/>
           </a:ln>
         </p:spPr>
+        <p:txBody>
+          <a:bodyPr/>
+          <a:lstStyle/>
+          <a:p>
+            <a:endParaRPr lang="en-DE"/>
+          </a:p>
+        </p:txBody>
       </p:sp>
       <p:sp>
         <p:nvSpPr>
@@ -4160,6 +4301,13 @@
             <a:prstDash val="solid"/>
           </a:ln>
         </p:spPr>
+        <p:txBody>
+          <a:bodyPr/>
+          <a:lstStyle/>
+          <a:p>
+            <a:endParaRPr lang="en-DE"/>
+          </a:p>
+        </p:txBody>
       </p:sp>
       <p:sp>
         <p:nvSpPr>
@@ -4257,6 +4405,13 @@
             <a:prstDash val="solid"/>
           </a:ln>
         </p:spPr>
+        <p:txBody>
+          <a:bodyPr/>
+          <a:lstStyle/>
+          <a:p>
+            <a:endParaRPr lang="en-DE"/>
+          </a:p>
+        </p:txBody>
       </p:sp>
       <p:sp>
         <p:nvSpPr>
@@ -4282,6 +4437,13 @@
             <a:prstDash val="solid"/>
           </a:ln>
         </p:spPr>
+        <p:txBody>
+          <a:bodyPr/>
+          <a:lstStyle/>
+          <a:p>
+            <a:endParaRPr lang="en-DE"/>
+          </a:p>
+        </p:txBody>
       </p:sp>
       <p:sp>
         <p:nvSpPr>
@@ -4431,6 +4593,13 @@
             </a:outerShdw>
           </a:effectLst>
         </p:spPr>
+        <p:txBody>
+          <a:bodyPr/>
+          <a:lstStyle/>
+          <a:p>
+            <a:endParaRPr lang="en-DE"/>
+          </a:p>
+        </p:txBody>
       </p:sp>
       <p:sp>
         <p:nvSpPr>
@@ -4456,6 +4625,13 @@
             <a:prstDash val="solid"/>
           </a:ln>
         </p:spPr>
+        <p:txBody>
+          <a:bodyPr/>
+          <a:lstStyle/>
+          <a:p>
+            <a:endParaRPr lang="en-DE"/>
+          </a:p>
+        </p:txBody>
       </p:sp>
       <p:sp>
         <p:nvSpPr>
@@ -4605,6 +4781,13 @@
             </a:outerShdw>
           </a:effectLst>
         </p:spPr>
+        <p:txBody>
+          <a:bodyPr/>
+          <a:lstStyle/>
+          <a:p>
+            <a:endParaRPr lang="en-DE"/>
+          </a:p>
+        </p:txBody>
       </p:sp>
       <p:sp>
         <p:nvSpPr>
@@ -4630,6 +4813,13 @@
             <a:prstDash val="solid"/>
           </a:ln>
         </p:spPr>
+        <p:txBody>
+          <a:bodyPr/>
+          <a:lstStyle/>
+          <a:p>
+            <a:endParaRPr lang="en-DE"/>
+          </a:p>
+        </p:txBody>
       </p:sp>
       <p:sp>
         <p:nvSpPr>
@@ -4779,6 +4969,13 @@
             </a:outerShdw>
           </a:effectLst>
         </p:spPr>
+        <p:txBody>
+          <a:bodyPr/>
+          <a:lstStyle/>
+          <a:p>
+            <a:endParaRPr lang="en-DE"/>
+          </a:p>
+        </p:txBody>
       </p:sp>
       <p:sp>
         <p:nvSpPr>
@@ -4804,6 +5001,13 @@
             <a:prstDash val="solid"/>
           </a:ln>
         </p:spPr>
+        <p:txBody>
+          <a:bodyPr/>
+          <a:lstStyle/>
+          <a:p>
+            <a:endParaRPr lang="en-DE"/>
+          </a:p>
+        </p:txBody>
       </p:sp>
       <p:sp>
         <p:nvSpPr>
@@ -4953,6 +5157,13 @@
             </a:outerShdw>
           </a:effectLst>
         </p:spPr>
+        <p:txBody>
+          <a:bodyPr/>
+          <a:lstStyle/>
+          <a:p>
+            <a:endParaRPr lang="en-DE"/>
+          </a:p>
+        </p:txBody>
       </p:sp>
       <p:sp>
         <p:nvSpPr>
@@ -4978,6 +5189,13 @@
             <a:prstDash val="solid"/>
           </a:ln>
         </p:spPr>
+        <p:txBody>
+          <a:bodyPr/>
+          <a:lstStyle/>
+          <a:p>
+            <a:endParaRPr lang="en-DE"/>
+          </a:p>
+        </p:txBody>
       </p:sp>
       <p:sp>
         <p:nvSpPr>
@@ -5127,6 +5345,13 @@
             </a:outerShdw>
           </a:effectLst>
         </p:spPr>
+        <p:txBody>
+          <a:bodyPr/>
+          <a:lstStyle/>
+          <a:p>
+            <a:endParaRPr lang="en-DE"/>
+          </a:p>
+        </p:txBody>
       </p:sp>
       <p:sp>
         <p:nvSpPr>
@@ -5152,6 +5377,13 @@
             <a:prstDash val="solid"/>
           </a:ln>
         </p:spPr>
+        <p:txBody>
+          <a:bodyPr/>
+          <a:lstStyle/>
+          <a:p>
+            <a:endParaRPr lang="en-DE"/>
+          </a:p>
+        </p:txBody>
       </p:sp>
       <p:sp>
         <p:nvSpPr>
@@ -5301,6 +5533,13 @@
             </a:outerShdw>
           </a:effectLst>
         </p:spPr>
+        <p:txBody>
+          <a:bodyPr/>
+          <a:lstStyle/>
+          <a:p>
+            <a:endParaRPr lang="en-DE"/>
+          </a:p>
+        </p:txBody>
       </p:sp>
       <p:sp>
         <p:nvSpPr>
@@ -5326,6 +5565,13 @@
             <a:prstDash val="solid"/>
           </a:ln>
         </p:spPr>
+        <p:txBody>
+          <a:bodyPr/>
+          <a:lstStyle/>
+          <a:p>
+            <a:endParaRPr lang="en-DE"/>
+          </a:p>
+        </p:txBody>
       </p:sp>
       <p:sp>
         <p:nvSpPr>
@@ -5468,6 +5714,13 @@
             <a:prstDash val="solid"/>
           </a:ln>
         </p:spPr>
+        <p:txBody>
+          <a:bodyPr/>
+          <a:lstStyle/>
+          <a:p>
+            <a:endParaRPr lang="en-DE"/>
+          </a:p>
+        </p:txBody>
       </p:sp>
       <p:sp>
         <p:nvSpPr>
@@ -5565,6 +5818,13 @@
             <a:prstDash val="solid"/>
           </a:ln>
         </p:spPr>
+        <p:txBody>
+          <a:bodyPr/>
+          <a:lstStyle/>
+          <a:p>
+            <a:endParaRPr lang="en-DE"/>
+          </a:p>
+        </p:txBody>
       </p:sp>
       <p:sp>
         <p:nvSpPr>
@@ -5590,6 +5850,13 @@
             <a:prstDash val="solid"/>
           </a:ln>
         </p:spPr>
+        <p:txBody>
+          <a:bodyPr/>
+          <a:lstStyle/>
+          <a:p>
+            <a:endParaRPr lang="en-DE"/>
+          </a:p>
+        </p:txBody>
       </p:sp>
       <p:sp>
         <p:nvSpPr>
@@ -5739,6 +6006,13 @@
             </a:outerShdw>
           </a:effectLst>
         </p:spPr>
+        <p:txBody>
+          <a:bodyPr/>
+          <a:lstStyle/>
+          <a:p>
+            <a:endParaRPr lang="en-DE"/>
+          </a:p>
+        </p:txBody>
       </p:sp>
       <p:sp>
         <p:nvSpPr>
@@ -5764,6 +6038,13 @@
             <a:prstDash val="solid"/>
           </a:ln>
         </p:spPr>
+        <p:txBody>
+          <a:bodyPr/>
+          <a:lstStyle/>
+          <a:p>
+            <a:endParaRPr lang="en-DE"/>
+          </a:p>
+        </p:txBody>
       </p:sp>
       <p:sp>
         <p:nvSpPr>
@@ -5874,6 +6155,13 @@
             </a:outerShdw>
           </a:effectLst>
         </p:spPr>
+        <p:txBody>
+          <a:bodyPr/>
+          <a:lstStyle/>
+          <a:p>
+            <a:endParaRPr lang="en-DE"/>
+          </a:p>
+        </p:txBody>
       </p:sp>
       <p:sp>
         <p:nvSpPr>
@@ -5899,6 +6187,13 @@
             <a:prstDash val="solid"/>
           </a:ln>
         </p:spPr>
+        <p:txBody>
+          <a:bodyPr/>
+          <a:lstStyle/>
+          <a:p>
+            <a:endParaRPr lang="en-DE"/>
+          </a:p>
+        </p:txBody>
       </p:sp>
       <p:sp>
         <p:nvSpPr>
@@ -6009,6 +6304,13 @@
             </a:outerShdw>
           </a:effectLst>
         </p:spPr>
+        <p:txBody>
+          <a:bodyPr/>
+          <a:lstStyle/>
+          <a:p>
+            <a:endParaRPr lang="en-DE"/>
+          </a:p>
+        </p:txBody>
       </p:sp>
       <p:sp>
         <p:nvSpPr>
@@ -6034,6 +6336,13 @@
             <a:prstDash val="solid"/>
           </a:ln>
         </p:spPr>
+        <p:txBody>
+          <a:bodyPr/>
+          <a:lstStyle/>
+          <a:p>
+            <a:endParaRPr lang="en-DE"/>
+          </a:p>
+        </p:txBody>
       </p:sp>
       <p:sp>
         <p:nvSpPr>
@@ -6144,6 +6453,13 @@
             </a:outerShdw>
           </a:effectLst>
         </p:spPr>
+        <p:txBody>
+          <a:bodyPr/>
+          <a:lstStyle/>
+          <a:p>
+            <a:endParaRPr lang="en-DE"/>
+          </a:p>
+        </p:txBody>
       </p:sp>
       <p:sp>
         <p:nvSpPr>
@@ -6169,6 +6485,13 @@
             <a:prstDash val="solid"/>
           </a:ln>
         </p:spPr>
+        <p:txBody>
+          <a:bodyPr/>
+          <a:lstStyle/>
+          <a:p>
+            <a:endParaRPr lang="en-DE"/>
+          </a:p>
+        </p:txBody>
       </p:sp>
       <p:sp>
         <p:nvSpPr>
@@ -6305,6 +6628,13 @@
             <a:prstDash val="solid"/>
           </a:ln>
         </p:spPr>
+        <p:txBody>
+          <a:bodyPr/>
+          <a:lstStyle/>
+          <a:p>
+            <a:endParaRPr lang="en-DE"/>
+          </a:p>
+        </p:txBody>
       </p:sp>
       <p:sp>
         <p:nvSpPr>
@@ -6334,6 +6664,13 @@
             <a:prstDash val="solid"/>
           </a:ln>
         </p:spPr>
+        <p:txBody>
+          <a:bodyPr/>
+          <a:lstStyle/>
+          <a:p>
+            <a:endParaRPr lang="en-DE"/>
+          </a:p>
+        </p:txBody>
       </p:sp>
       <p:sp>
         <p:nvSpPr>
@@ -6435,6 +6772,13 @@
             <a:prstDash val="solid"/>
           </a:ln>
         </p:spPr>
+        <p:txBody>
+          <a:bodyPr/>
+          <a:lstStyle/>
+          <a:p>
+            <a:endParaRPr lang="en-DE"/>
+          </a:p>
+        </p:txBody>
       </p:sp>
       <p:sp>
         <p:nvSpPr>
@@ -6660,6 +7004,13 @@
             <a:prstDash val="solid"/>
           </a:ln>
         </p:spPr>
+        <p:txBody>
+          <a:bodyPr/>
+          <a:lstStyle/>
+          <a:p>
+            <a:endParaRPr lang="en-DE"/>
+          </a:p>
+        </p:txBody>
       </p:sp>
       <p:sp>
         <p:nvSpPr>
@@ -6757,6 +7108,13 @@
             <a:prstDash val="solid"/>
           </a:ln>
         </p:spPr>
+        <p:txBody>
+          <a:bodyPr/>
+          <a:lstStyle/>
+          <a:p>
+            <a:endParaRPr lang="en-DE"/>
+          </a:p>
+        </p:txBody>
       </p:sp>
       <p:sp>
         <p:nvSpPr>
@@ -6782,6 +7140,13 @@
             <a:prstDash val="solid"/>
           </a:ln>
         </p:spPr>
+        <p:txBody>
+          <a:bodyPr/>
+          <a:lstStyle/>
+          <a:p>
+            <a:endParaRPr lang="en-DE"/>
+          </a:p>
+        </p:txBody>
       </p:sp>
       <p:sp>
         <p:nvSpPr>
@@ -6894,7 +7259,7 @@
                 <a:ea typeface="Calibri" pitchFamily="34" charset="-122"/>
                 <a:cs typeface="Calibri" pitchFamily="34" charset="-120"/>
               </a:rPr>
-              <a:t>WHAT WE'LL COVER</a:t>
+              <a:t>WHAT I'LL COVER</a:t>
             </a:r>
             <a:endParaRPr lang="en-US" sz="1100" dirty="0"/>
           </a:p>
@@ -6931,6 +7296,13 @@
             </a:outerShdw>
           </a:effectLst>
         </p:spPr>
+        <p:txBody>
+          <a:bodyPr/>
+          <a:lstStyle/>
+          <a:p>
+            <a:endParaRPr lang="en-DE"/>
+          </a:p>
+        </p:txBody>
       </p:sp>
       <p:sp>
         <p:nvSpPr>
@@ -6956,6 +7328,13 @@
             <a:prstDash val="solid"/>
           </a:ln>
         </p:spPr>
+        <p:txBody>
+          <a:bodyPr/>
+          <a:lstStyle/>
+          <a:p>
+            <a:endParaRPr lang="en-DE"/>
+          </a:p>
+        </p:txBody>
       </p:sp>
       <p:sp>
         <p:nvSpPr>
@@ -7105,6 +7484,13 @@
             </a:outerShdw>
           </a:effectLst>
         </p:spPr>
+        <p:txBody>
+          <a:bodyPr/>
+          <a:lstStyle/>
+          <a:p>
+            <a:endParaRPr lang="en-DE"/>
+          </a:p>
+        </p:txBody>
       </p:sp>
       <p:sp>
         <p:nvSpPr>
@@ -7130,6 +7516,13 @@
             <a:prstDash val="solid"/>
           </a:ln>
         </p:spPr>
+        <p:txBody>
+          <a:bodyPr/>
+          <a:lstStyle/>
+          <a:p>
+            <a:endParaRPr lang="en-DE"/>
+          </a:p>
+        </p:txBody>
       </p:sp>
       <p:sp>
         <p:nvSpPr>
@@ -7279,6 +7672,13 @@
             </a:outerShdw>
           </a:effectLst>
         </p:spPr>
+        <p:txBody>
+          <a:bodyPr/>
+          <a:lstStyle/>
+          <a:p>
+            <a:endParaRPr lang="en-DE"/>
+          </a:p>
+        </p:txBody>
       </p:sp>
       <p:sp>
         <p:nvSpPr>
@@ -7304,6 +7704,13 @@
             <a:prstDash val="solid"/>
           </a:ln>
         </p:spPr>
+        <p:txBody>
+          <a:bodyPr/>
+          <a:lstStyle/>
+          <a:p>
+            <a:endParaRPr lang="en-DE"/>
+          </a:p>
+        </p:txBody>
       </p:sp>
       <p:sp>
         <p:nvSpPr>
@@ -7453,6 +7860,13 @@
             </a:outerShdw>
           </a:effectLst>
         </p:spPr>
+        <p:txBody>
+          <a:bodyPr/>
+          <a:lstStyle/>
+          <a:p>
+            <a:endParaRPr lang="en-DE"/>
+          </a:p>
+        </p:txBody>
       </p:sp>
       <p:sp>
         <p:nvSpPr>
@@ -7478,6 +7892,13 @@
             <a:prstDash val="solid"/>
           </a:ln>
         </p:spPr>
+        <p:txBody>
+          <a:bodyPr/>
+          <a:lstStyle/>
+          <a:p>
+            <a:endParaRPr lang="en-DE"/>
+          </a:p>
+        </p:txBody>
       </p:sp>
       <p:sp>
         <p:nvSpPr>
@@ -7627,6 +8048,13 @@
             </a:outerShdw>
           </a:effectLst>
         </p:spPr>
+        <p:txBody>
+          <a:bodyPr/>
+          <a:lstStyle/>
+          <a:p>
+            <a:endParaRPr lang="en-DE"/>
+          </a:p>
+        </p:txBody>
       </p:sp>
       <p:sp>
         <p:nvSpPr>
@@ -7652,6 +8080,13 @@
             <a:prstDash val="solid"/>
           </a:ln>
         </p:spPr>
+        <p:txBody>
+          <a:bodyPr/>
+          <a:lstStyle/>
+          <a:p>
+            <a:endParaRPr lang="en-DE"/>
+          </a:p>
+        </p:txBody>
       </p:sp>
       <p:sp>
         <p:nvSpPr>
@@ -7801,6 +8236,13 @@
             </a:outerShdw>
           </a:effectLst>
         </p:spPr>
+        <p:txBody>
+          <a:bodyPr/>
+          <a:lstStyle/>
+          <a:p>
+            <a:endParaRPr lang="en-DE"/>
+          </a:p>
+        </p:txBody>
       </p:sp>
       <p:sp>
         <p:nvSpPr>
@@ -7826,6 +8268,13 @@
             <a:prstDash val="solid"/>
           </a:ln>
         </p:spPr>
+        <p:txBody>
+          <a:bodyPr/>
+          <a:lstStyle/>
+          <a:p>
+            <a:endParaRPr lang="en-DE"/>
+          </a:p>
+        </p:txBody>
       </p:sp>
       <p:sp>
         <p:nvSpPr>
@@ -8001,6 +8450,13 @@
             <a:prstDash val="solid"/>
           </a:ln>
         </p:spPr>
+        <p:txBody>
+          <a:bodyPr/>
+          <a:lstStyle/>
+          <a:p>
+            <a:endParaRPr lang="en-DE"/>
+          </a:p>
+        </p:txBody>
       </p:sp>
       <p:sp>
         <p:nvSpPr>
@@ -8026,6 +8482,13 @@
             <a:prstDash val="solid"/>
           </a:ln>
         </p:spPr>
+        <p:txBody>
+          <a:bodyPr/>
+          <a:lstStyle/>
+          <a:p>
+            <a:endParaRPr lang="en-DE"/>
+          </a:p>
+        </p:txBody>
       </p:sp>
       <p:sp>
         <p:nvSpPr>
@@ -8175,6 +8638,13 @@
             </a:outerShdw>
           </a:effectLst>
         </p:spPr>
+        <p:txBody>
+          <a:bodyPr/>
+          <a:lstStyle/>
+          <a:p>
+            <a:endParaRPr lang="en-DE"/>
+          </a:p>
+        </p:txBody>
       </p:sp>
       <p:sp>
         <p:nvSpPr>
@@ -8200,6 +8670,13 @@
             <a:prstDash val="solid"/>
           </a:ln>
         </p:spPr>
+        <p:txBody>
+          <a:bodyPr/>
+          <a:lstStyle/>
+          <a:p>
+            <a:endParaRPr lang="en-DE"/>
+          </a:p>
+        </p:txBody>
       </p:sp>
       <p:sp>
         <p:nvSpPr>
@@ -8427,6 +8904,13 @@
             </a:outerShdw>
           </a:effectLst>
         </p:spPr>
+        <p:txBody>
+          <a:bodyPr/>
+          <a:lstStyle/>
+          <a:p>
+            <a:endParaRPr lang="en-DE"/>
+          </a:p>
+        </p:txBody>
       </p:sp>
       <p:sp>
         <p:nvSpPr>
@@ -8452,6 +8936,13 @@
             <a:prstDash val="solid"/>
           </a:ln>
         </p:spPr>
+        <p:txBody>
+          <a:bodyPr/>
+          <a:lstStyle/>
+          <a:p>
+            <a:endParaRPr lang="en-DE"/>
+          </a:p>
+        </p:txBody>
       </p:sp>
       <p:sp>
         <p:nvSpPr>
@@ -8672,6 +9163,13 @@
             <a:prstDash val="solid"/>
           </a:ln>
         </p:spPr>
+        <p:txBody>
+          <a:bodyPr/>
+          <a:lstStyle/>
+          <a:p>
+            <a:endParaRPr lang="en-DE"/>
+          </a:p>
+        </p:txBody>
       </p:sp>
       <p:sp>
         <p:nvSpPr>
@@ -8769,6 +9267,13 @@
             <a:prstDash val="solid"/>
           </a:ln>
         </p:spPr>
+        <p:txBody>
+          <a:bodyPr/>
+          <a:lstStyle/>
+          <a:p>
+            <a:endParaRPr lang="en-DE"/>
+          </a:p>
+        </p:txBody>
       </p:sp>
       <p:sp>
         <p:nvSpPr>
@@ -8794,6 +9299,13 @@
             <a:prstDash val="solid"/>
           </a:ln>
         </p:spPr>
+        <p:txBody>
+          <a:bodyPr/>
+          <a:lstStyle/>
+          <a:p>
+            <a:endParaRPr lang="en-DE"/>
+          </a:p>
+        </p:txBody>
       </p:sp>
       <p:sp>
         <p:nvSpPr>
@@ -8927,10 +9439,10 @@
           <p:nvPr/>
         </p:nvPicPr>
         <p:blipFill>
-          <a:blip>
+          <a:blip r:embed="rId3">
             <a:extLst>
               <a:ext uri="{96DAC541-7B7A-43D3-8B79-37D633B846F1}">
-                <asvg:svgBlip xmlns:asvg="http://schemas.microsoft.com/office/drawing/2016/SVG/main" r:embed="rId3"/>
+                <asvg:svgBlip xmlns:asvg="http://schemas.microsoft.com/office/drawing/2016/SVG/main" r:embed="rId4"/>
               </a:ext>
             </a:extLst>
           </a:blip>
@@ -9005,6 +9517,13 @@
             <a:prstDash val="solid"/>
           </a:ln>
         </p:spPr>
+        <p:txBody>
+          <a:bodyPr/>
+          <a:lstStyle/>
+          <a:p>
+            <a:endParaRPr lang="en-DE"/>
+          </a:p>
+        </p:txBody>
       </p:sp>
       <p:sp>
         <p:nvSpPr>
@@ -9030,6 +9549,13 @@
             <a:prstDash val="solid"/>
           </a:ln>
         </p:spPr>
+        <p:txBody>
+          <a:bodyPr/>
+          <a:lstStyle/>
+          <a:p>
+            <a:endParaRPr lang="en-DE"/>
+          </a:p>
+        </p:txBody>
       </p:sp>
       <p:sp>
         <p:nvSpPr>
@@ -9179,6 +9705,13 @@
             </a:outerShdw>
           </a:effectLst>
         </p:spPr>
+        <p:txBody>
+          <a:bodyPr/>
+          <a:lstStyle/>
+          <a:p>
+            <a:endParaRPr lang="en-DE"/>
+          </a:p>
+        </p:txBody>
       </p:sp>
       <p:sp>
         <p:nvSpPr>
@@ -9204,6 +9737,13 @@
             <a:prstDash val="solid"/>
           </a:ln>
         </p:spPr>
+        <p:txBody>
+          <a:bodyPr/>
+          <a:lstStyle/>
+          <a:p>
+            <a:endParaRPr lang="en-DE"/>
+          </a:p>
+        </p:txBody>
       </p:sp>
       <p:sp>
         <p:nvSpPr>
@@ -9431,6 +9971,13 @@
             </a:outerShdw>
           </a:effectLst>
         </p:spPr>
+        <p:txBody>
+          <a:bodyPr/>
+          <a:lstStyle/>
+          <a:p>
+            <a:endParaRPr lang="en-DE"/>
+          </a:p>
+        </p:txBody>
       </p:sp>
       <p:sp>
         <p:nvSpPr>
@@ -9456,6 +10003,13 @@
             <a:prstDash val="solid"/>
           </a:ln>
         </p:spPr>
+        <p:txBody>
+          <a:bodyPr/>
+          <a:lstStyle/>
+          <a:p>
+            <a:endParaRPr lang="en-DE"/>
+          </a:p>
+        </p:txBody>
       </p:sp>
       <p:sp>
         <p:nvSpPr>
@@ -9676,6 +10230,13 @@
             <a:prstDash val="solid"/>
           </a:ln>
         </p:spPr>
+        <p:txBody>
+          <a:bodyPr/>
+          <a:lstStyle/>
+          <a:p>
+            <a:endParaRPr lang="en-DE"/>
+          </a:p>
+        </p:txBody>
       </p:sp>
       <p:sp>
         <p:nvSpPr>
@@ -9779,6 +10340,13 @@
             <a:prstDash val="solid"/>
           </a:ln>
         </p:spPr>
+        <p:txBody>
+          <a:bodyPr/>
+          <a:lstStyle/>
+          <a:p>
+            <a:endParaRPr lang="en-DE"/>
+          </a:p>
+        </p:txBody>
       </p:sp>
       <p:sp>
         <p:nvSpPr>
@@ -9882,6 +10450,13 @@
             <a:prstDash val="solid"/>
           </a:ln>
         </p:spPr>
+        <p:txBody>
+          <a:bodyPr/>
+          <a:lstStyle/>
+          <a:p>
+            <a:endParaRPr lang="en-DE"/>
+          </a:p>
+        </p:txBody>
       </p:sp>
       <p:sp>
         <p:nvSpPr>
@@ -9985,6 +10560,13 @@
             <a:prstDash val="solid"/>
           </a:ln>
         </p:spPr>
+        <p:txBody>
+          <a:bodyPr/>
+          <a:lstStyle/>
+          <a:p>
+            <a:endParaRPr lang="en-DE"/>
+          </a:p>
+        </p:txBody>
       </p:sp>
       <p:sp>
         <p:nvSpPr>
@@ -10088,6 +10670,13 @@
             <a:prstDash val="solid"/>
           </a:ln>
         </p:spPr>
+        <p:txBody>
+          <a:bodyPr/>
+          <a:lstStyle/>
+          <a:p>
+            <a:endParaRPr lang="en-DE"/>
+          </a:p>
+        </p:txBody>
       </p:sp>
       <p:sp>
         <p:nvSpPr>
@@ -10189,6 +10778,13 @@
             <a:prstDash val="solid"/>
           </a:ln>
         </p:spPr>
+        <p:txBody>
+          <a:bodyPr/>
+          <a:lstStyle/>
+          <a:p>
+            <a:endParaRPr lang="en-DE"/>
+          </a:p>
+        </p:txBody>
       </p:sp>
       <p:sp>
         <p:nvSpPr>
@@ -10214,6 +10810,13 @@
             <a:prstDash val="solid"/>
           </a:ln>
         </p:spPr>
+        <p:txBody>
+          <a:bodyPr/>
+          <a:lstStyle/>
+          <a:p>
+            <a:endParaRPr lang="en-DE"/>
+          </a:p>
+        </p:txBody>
       </p:sp>
       <p:sp>
         <p:nvSpPr>
@@ -10311,6 +10914,13 @@
             <a:prstDash val="solid"/>
           </a:ln>
         </p:spPr>
+        <p:txBody>
+          <a:bodyPr/>
+          <a:lstStyle/>
+          <a:p>
+            <a:endParaRPr lang="en-DE"/>
+          </a:p>
+        </p:txBody>
       </p:sp>
       <p:sp>
         <p:nvSpPr>
@@ -10336,6 +10946,13 @@
             <a:prstDash val="solid"/>
           </a:ln>
         </p:spPr>
+        <p:txBody>
+          <a:bodyPr/>
+          <a:lstStyle/>
+          <a:p>
+            <a:endParaRPr lang="en-DE"/>
+          </a:p>
+        </p:txBody>
       </p:sp>
       <p:sp>
         <p:nvSpPr>
@@ -10485,6 +11102,13 @@
             </a:outerShdw>
           </a:effectLst>
         </p:spPr>
+        <p:txBody>
+          <a:bodyPr/>
+          <a:lstStyle/>
+          <a:p>
+            <a:endParaRPr lang="en-DE"/>
+          </a:p>
+        </p:txBody>
       </p:sp>
       <p:sp>
         <p:nvSpPr>
@@ -10510,6 +11134,13 @@
             <a:prstDash val="solid"/>
           </a:ln>
         </p:spPr>
+        <p:txBody>
+          <a:bodyPr/>
+          <a:lstStyle/>
+          <a:p>
+            <a:endParaRPr lang="en-DE"/>
+          </a:p>
+        </p:txBody>
       </p:sp>
       <p:sp>
         <p:nvSpPr>
@@ -10620,6 +11251,13 @@
             </a:outerShdw>
           </a:effectLst>
         </p:spPr>
+        <p:txBody>
+          <a:bodyPr/>
+          <a:lstStyle/>
+          <a:p>
+            <a:endParaRPr lang="en-DE"/>
+          </a:p>
+        </p:txBody>
       </p:sp>
       <p:sp>
         <p:nvSpPr>
@@ -10645,6 +11283,13 @@
             <a:prstDash val="solid"/>
           </a:ln>
         </p:spPr>
+        <p:txBody>
+          <a:bodyPr/>
+          <a:lstStyle/>
+          <a:p>
+            <a:endParaRPr lang="en-DE"/>
+          </a:p>
+        </p:txBody>
       </p:sp>
       <p:sp>
         <p:nvSpPr>
@@ -10755,6 +11400,13 @@
             </a:outerShdw>
           </a:effectLst>
         </p:spPr>
+        <p:txBody>
+          <a:bodyPr/>
+          <a:lstStyle/>
+          <a:p>
+            <a:endParaRPr lang="en-DE"/>
+          </a:p>
+        </p:txBody>
       </p:sp>
       <p:sp>
         <p:nvSpPr>
@@ -10780,6 +11432,13 @@
             <a:prstDash val="solid"/>
           </a:ln>
         </p:spPr>
+        <p:txBody>
+          <a:bodyPr/>
+          <a:lstStyle/>
+          <a:p>
+            <a:endParaRPr lang="en-DE"/>
+          </a:p>
+        </p:txBody>
       </p:sp>
       <p:sp>
         <p:nvSpPr>
@@ -10890,6 +11549,13 @@
             </a:outerShdw>
           </a:effectLst>
         </p:spPr>
+        <p:txBody>
+          <a:bodyPr/>
+          <a:lstStyle/>
+          <a:p>
+            <a:endParaRPr lang="en-DE"/>
+          </a:p>
+        </p:txBody>
       </p:sp>
       <p:sp>
         <p:nvSpPr>
@@ -10915,6 +11581,13 @@
             <a:prstDash val="solid"/>
           </a:ln>
         </p:spPr>
+        <p:txBody>
+          <a:bodyPr/>
+          <a:lstStyle/>
+          <a:p>
+            <a:endParaRPr lang="en-DE"/>
+          </a:p>
+        </p:txBody>
       </p:sp>
       <p:sp>
         <p:nvSpPr>
@@ -11025,6 +11698,13 @@
             </a:outerShdw>
           </a:effectLst>
         </p:spPr>
+        <p:txBody>
+          <a:bodyPr/>
+          <a:lstStyle/>
+          <a:p>
+            <a:endParaRPr lang="en-DE"/>
+          </a:p>
+        </p:txBody>
       </p:sp>
       <p:sp>
         <p:nvSpPr>
@@ -11050,6 +11730,13 @@
             <a:prstDash val="solid"/>
           </a:ln>
         </p:spPr>
+        <p:txBody>
+          <a:bodyPr/>
+          <a:lstStyle/>
+          <a:p>
+            <a:endParaRPr lang="en-DE"/>
+          </a:p>
+        </p:txBody>
       </p:sp>
       <p:sp>
         <p:nvSpPr>
@@ -11160,6 +11847,13 @@
             </a:outerShdw>
           </a:effectLst>
         </p:spPr>
+        <p:txBody>
+          <a:bodyPr/>
+          <a:lstStyle/>
+          <a:p>
+            <a:endParaRPr lang="en-DE"/>
+          </a:p>
+        </p:txBody>
       </p:sp>
       <p:sp>
         <p:nvSpPr>
@@ -11185,6 +11879,13 @@
             <a:prstDash val="solid"/>
           </a:ln>
         </p:spPr>
+        <p:txBody>
+          <a:bodyPr/>
+          <a:lstStyle/>
+          <a:p>
+            <a:endParaRPr lang="en-DE"/>
+          </a:p>
+        </p:txBody>
       </p:sp>
       <p:sp>
         <p:nvSpPr>
@@ -11321,6 +12022,13 @@
             <a:prstDash val="solid"/>
           </a:ln>
         </p:spPr>
+        <p:txBody>
+          <a:bodyPr/>
+          <a:lstStyle/>
+          <a:p>
+            <a:endParaRPr lang="en-DE"/>
+          </a:p>
+        </p:txBody>
       </p:sp>
       <p:sp>
         <p:nvSpPr>
@@ -11346,6 +12054,13 @@
             <a:prstDash val="solid"/>
           </a:ln>
         </p:spPr>
+        <p:txBody>
+          <a:bodyPr/>
+          <a:lstStyle/>
+          <a:p>
+            <a:endParaRPr lang="en-DE"/>
+          </a:p>
+        </p:txBody>
       </p:sp>
       <p:sp>
         <p:nvSpPr>
@@ -11495,6 +12210,13 @@
             </a:outerShdw>
           </a:effectLst>
         </p:spPr>
+        <p:txBody>
+          <a:bodyPr/>
+          <a:lstStyle/>
+          <a:p>
+            <a:endParaRPr lang="en-DE"/>
+          </a:p>
+        </p:txBody>
       </p:sp>
       <p:sp>
         <p:nvSpPr>
@@ -11605,6 +12327,13 @@
             </a:outerShdw>
           </a:effectLst>
         </p:spPr>
+        <p:txBody>
+          <a:bodyPr/>
+          <a:lstStyle/>
+          <a:p>
+            <a:endParaRPr lang="en-DE"/>
+          </a:p>
+        </p:txBody>
       </p:sp>
       <p:sp>
         <p:nvSpPr>
@@ -11715,6 +12444,13 @@
             </a:outerShdw>
           </a:effectLst>
         </p:spPr>
+        <p:txBody>
+          <a:bodyPr/>
+          <a:lstStyle/>
+          <a:p>
+            <a:endParaRPr lang="en-DE"/>
+          </a:p>
+        </p:txBody>
       </p:sp>
       <p:sp>
         <p:nvSpPr>
@@ -11825,6 +12561,13 @@
             </a:outerShdw>
           </a:effectLst>
         </p:spPr>
+        <p:txBody>
+          <a:bodyPr/>
+          <a:lstStyle/>
+          <a:p>
+            <a:endParaRPr lang="en-DE"/>
+          </a:p>
+        </p:txBody>
       </p:sp>
       <p:sp>
         <p:nvSpPr>
@@ -13276,6 +14019,13 @@
             <a:prstDash val="solid"/>
           </a:ln>
         </p:spPr>
+        <p:txBody>
+          <a:bodyPr/>
+          <a:lstStyle/>
+          <a:p>
+            <a:endParaRPr lang="en-DE"/>
+          </a:p>
+        </p:txBody>
       </p:sp>
       <p:sp>
         <p:nvSpPr>
@@ -13301,6 +14051,13 @@
             <a:prstDash val="solid"/>
           </a:ln>
         </p:spPr>
+        <p:txBody>
+          <a:bodyPr/>
+          <a:lstStyle/>
+          <a:p>
+            <a:endParaRPr lang="en-DE"/>
+          </a:p>
+        </p:txBody>
       </p:sp>
       <p:sp>
         <p:nvSpPr>
@@ -13466,6 +14223,13 @@
             </a:outerShdw>
           </a:effectLst>
         </p:spPr>
+        <p:txBody>
+          <a:bodyPr/>
+          <a:lstStyle/>
+          <a:p>
+            <a:endParaRPr lang="en-DE"/>
+          </a:p>
+        </p:txBody>
       </p:sp>
       <p:sp>
         <p:nvSpPr>
@@ -13491,6 +14255,13 @@
             <a:prstDash val="solid"/>
           </a:ln>
         </p:spPr>
+        <p:txBody>
+          <a:bodyPr/>
+          <a:lstStyle/>
+          <a:p>
+            <a:endParaRPr lang="en-DE"/>
+          </a:p>
+        </p:txBody>
       </p:sp>
       <p:sp>
         <p:nvSpPr>
@@ -13618,6 +14389,13 @@
             </a:outerShdw>
           </a:effectLst>
         </p:spPr>
+        <p:txBody>
+          <a:bodyPr/>
+          <a:lstStyle/>
+          <a:p>
+            <a:endParaRPr lang="en-DE"/>
+          </a:p>
+        </p:txBody>
       </p:sp>
       <p:sp>
         <p:nvSpPr>
@@ -13643,6 +14421,13 @@
             <a:prstDash val="solid"/>
           </a:ln>
         </p:spPr>
+        <p:txBody>
+          <a:bodyPr/>
+          <a:lstStyle/>
+          <a:p>
+            <a:endParaRPr lang="en-DE"/>
+          </a:p>
+        </p:txBody>
       </p:sp>
       <p:sp>
         <p:nvSpPr>
@@ -13787,6 +14572,13 @@
             </a:outerShdw>
           </a:effectLst>
         </p:spPr>
+        <p:txBody>
+          <a:bodyPr/>
+          <a:lstStyle/>
+          <a:p>
+            <a:endParaRPr lang="en-DE"/>
+          </a:p>
+        </p:txBody>
       </p:sp>
       <p:sp>
         <p:nvSpPr>
@@ -13812,6 +14604,13 @@
             <a:prstDash val="solid"/>
           </a:ln>
         </p:spPr>
+        <p:txBody>
+          <a:bodyPr/>
+          <a:lstStyle/>
+          <a:p>
+            <a:endParaRPr lang="en-DE"/>
+          </a:p>
+        </p:txBody>
       </p:sp>
       <p:sp>
         <p:nvSpPr>
@@ -13948,6 +14747,13 @@
             <a:prstDash val="solid"/>
           </a:ln>
         </p:spPr>
+        <p:txBody>
+          <a:bodyPr/>
+          <a:lstStyle/>
+          <a:p>
+            <a:endParaRPr lang="en-DE"/>
+          </a:p>
+        </p:txBody>
       </p:sp>
       <p:sp>
         <p:nvSpPr>
@@ -13973,6 +14779,13 @@
             <a:prstDash val="solid"/>
           </a:ln>
         </p:spPr>
+        <p:txBody>
+          <a:bodyPr/>
+          <a:lstStyle/>
+          <a:p>
+            <a:endParaRPr lang="en-DE"/>
+          </a:p>
+        </p:txBody>
       </p:sp>
       <p:sp>
         <p:nvSpPr>
@@ -14122,6 +14935,13 @@
             </a:outerShdw>
           </a:effectLst>
         </p:spPr>
+        <p:txBody>
+          <a:bodyPr/>
+          <a:lstStyle/>
+          <a:p>
+            <a:endParaRPr lang="en-DE"/>
+          </a:p>
+        </p:txBody>
       </p:sp>
       <p:sp>
         <p:nvSpPr>
@@ -14147,6 +14967,13 @@
             <a:prstDash val="solid"/>
           </a:ln>
         </p:spPr>
+        <p:txBody>
+          <a:bodyPr/>
+          <a:lstStyle/>
+          <a:p>
+            <a:endParaRPr lang="en-DE"/>
+          </a:p>
+        </p:txBody>
       </p:sp>
       <p:sp>
         <p:nvSpPr>
@@ -14291,6 +15118,13 @@
             </a:outerShdw>
           </a:effectLst>
         </p:spPr>
+        <p:txBody>
+          <a:bodyPr/>
+          <a:lstStyle/>
+          <a:p>
+            <a:endParaRPr lang="en-DE"/>
+          </a:p>
+        </p:txBody>
       </p:sp>
       <p:sp>
         <p:nvSpPr>
@@ -14316,6 +15150,13 @@
             <a:prstDash val="solid"/>
           </a:ln>
         </p:spPr>
+        <p:txBody>
+          <a:bodyPr/>
+          <a:lstStyle/>
+          <a:p>
+            <a:endParaRPr lang="en-DE"/>
+          </a:p>
+        </p:txBody>
       </p:sp>
       <p:sp>
         <p:nvSpPr>
